--- a/dist/초6/수학/연산과비례/초6_수학_연산과비례_08_비례배분.pptx
+++ b/dist/초6/수학/연산과비례/초6_수학_연산과비례_08_비례배분.pptx
@@ -120,20 +120,20 @@
   <p:extLst>
     <p:ext uri="{521415D9-36F7-43E2-AB2F-B90AF26B5E84}">
       <p14:sectionLst xmlns:p14="http://schemas.microsoft.com/office/powerpoint/2010/main">
-        <p14:section name="도입" id="{2e8e8c19-ea80-e1e8-e5ae-00ea210066f9}">
+        <p14:section name="도입" id="{302019bc-8c45-91a9-1285-62398d04abb7}">
           <p14:sldIdLst>
             <p14:sldId id="256"/>
             <p14:sldId id="257"/>
           </p14:sldIdLst>
         </p14:section>
-        <p14:section name="개념" id="{54bcf8b9-2d7e-af8d-07ee-0329a0d64fdb}">
+        <p14:section name="개념" id="{f6fae488-7825-ac78-d37e-56d7d29c8403}">
           <p14:sldIdLst>
             <p14:sldId id="258"/>
             <p14:sldId id="259"/>
             <p14:sldId id="262"/>
           </p14:sldIdLst>
         </p14:section>
-        <p14:section name="연습" id="{fc2bfaf8-d896-69d8-d728-4e0d367a9aea}">
+        <p14:section name="연습" id="{a37d4577-3e05-2594-32f1-bd1ce4d362ce}">
           <p14:sldIdLst>
             <p14:sldId id="260"/>
             <p14:sldId id="261"/>
@@ -141,25 +141,25 @@
             <p14:sldId id="264"/>
           </p14:sldIdLst>
         </p14:section>
-        <p14:section name="개념" id="{fcee4958-98f7-0690-af4e-ff037ef4538d}">
+        <p14:section name="개념" id="{3035e64c-6bf5-c54f-4785-b3a74a1fd1ca}">
           <p14:sldIdLst/>
         </p14:section>
-        <p14:section name="연습" id="{6f66f73b-ffda-f2f3-84ce-9055af7ac21c}">
+        <p14:section name="연습" id="{b07fb35d-3b2a-0e6a-e6f6-5ddb2ad604f4}">
           <p14:sldIdLst/>
         </p14:section>
-        <p14:section name="확인" id="{b1e04eff-9cf5-52c5-10bb-5a0cf66af2d9}">
+        <p14:section name="확인" id="{f2ae20fc-a605-64bb-2619-cece974d13b2}">
           <p14:sldIdLst>
             <p14:sldId id="265"/>
             <p14:sldId id="266"/>
             <p14:sldId id="267"/>
           </p14:sldIdLst>
         </p14:section>
-        <p14:section name="정리" id="{ef3db0ff-ccf1-dd2a-54b9-3a9b973ee103}">
+        <p14:section name="정리" id="{c75eeadf-8df4-cd8b-fa78-e692c4b25006}">
           <p14:sldIdLst>
             <p14:sldId id="268"/>
           </p14:sldIdLst>
         </p14:section>
-        <p14:section name="보충" id="{74d0c2c6-e91a-7be8-a4dc-cb1ddcff53e6}">
+        <p14:section name="보충" id="{09240ea6-69a9-08e9-5b45-5c1e9717e6a8}">
           <p14:sldIdLst>
             <p14:sldId id="269"/>
           </p14:sldIdLst>
@@ -3662,7 +3662,7 @@
                 <a:ea typeface="맑은 고딕" pitchFamily="34" charset="-122"/>
                 <a:cs typeface="맑은 고딕" pitchFamily="34" charset="-120"/>
               </a:rPr>
-              <a:t>둘레 36 cm,</a:t>
+              <a:t>둘레 36 cm,</a:t>
             </a:r>
             <a:endParaRPr lang="ko-KR" sz="2800" dirty="0"/>
           </a:p>
@@ -4199,7 +4199,7 @@
                 <a:ea typeface="맑은 고딕" pitchFamily="34" charset="-122"/>
                 <a:cs typeface="맑은 고딕" pitchFamily="34" charset="-120"/>
               </a:rPr>
-              <a:t>④ 10 cm</a:t>
+              <a:t>④ 10 cm</a:t>
             </a:r>
             <a:endParaRPr lang="ko-KR" sz="2800" dirty="0"/>
           </a:p>
@@ -4402,7 +4402,7 @@
                 <a:ea typeface="맑은 고딕" pitchFamily="34" charset="-122"/>
                 <a:cs typeface="맑은 고딕" pitchFamily="34" charset="-120"/>
               </a:rPr>
-              <a:t>④ 20 cm</a:t>
+              <a:t>④ 20 cm</a:t>
             </a:r>
             <a:endParaRPr lang="ko-KR" sz="2800" dirty="0"/>
           </a:p>
@@ -5439,7 +5439,7 @@
                 <a:ea typeface="맑은 고딕" pitchFamily="34" charset="-122"/>
                 <a:cs typeface="맑은 고딕" pitchFamily="34" charset="-120"/>
               </a:rPr>
-              <a:t>③ 둘레 50 cm,</a:t>
+              <a:t>③ 둘레 50 cm,</a:t>
             </a:r>
             <a:endParaRPr lang="ko-KR" sz="2200" dirty="0"/>
           </a:p>
@@ -9713,7 +9713,7 @@
                 <a:ea typeface="맑은 고딕" pitchFamily="34" charset="-122"/>
                 <a:cs typeface="맑은 고딕" pitchFamily="34" charset="-120"/>
               </a:rPr>
-              <a:t>둘레가 60 cm, 가로 : 세로 = 3 : 2예요.</a:t>
+              <a:t>둘레가 60 cm, 가로 : 세로 = 3 : 2예요.</a:t>
             </a:r>
             <a:endParaRPr lang="ko-KR" sz="2800" dirty="0"/>
           </a:p>
@@ -10392,7 +10392,7 @@
                 <a:ea typeface="맑은 고딕" pitchFamily="34" charset="-122"/>
                 <a:cs typeface="맑은 고딕" pitchFamily="34" charset="-120"/>
               </a:rPr>
-              <a:t>둘레가 40 cm, 가로 : 세로 = 3 : 1인 직사각형을 그려요.</a:t>
+              <a:t>둘레가 40 cm, 가로 : 세로 = 3 : 1인 직사각형을 그려요.</a:t>
             </a:r>
             <a:endParaRPr lang="ko-KR" sz="2800" dirty="0"/>
           </a:p>
@@ -10508,7 +10508,7 @@
                 <a:ea typeface="맑은 고딕" pitchFamily="34" charset="-122"/>
                 <a:cs typeface="맑은 고딕" pitchFamily="34" charset="-120"/>
               </a:rPr>
-              <a:t>토끼: 가로 30 cm</a:t>
+              <a:t>토끼: 가로 30 cm</a:t>
             </a:r>
             <a:endParaRPr lang="ko-KR" sz="2200" dirty="0"/>
           </a:p>
@@ -10611,7 +10611,7 @@
                 <a:ea typeface="맑은 고딕" pitchFamily="34" charset="-122"/>
                 <a:cs typeface="맑은 고딕" pitchFamily="34" charset="-120"/>
               </a:rPr>
-              <a:t>곰: 가로 15 cm</a:t>
+              <a:t>곰: 가로 15 cm</a:t>
             </a:r>
             <a:endParaRPr lang="ko-KR" sz="2200" dirty="0"/>
           </a:p>
@@ -11056,7 +11056,7 @@
                 <a:ea typeface="맑은 고딕" pitchFamily="34" charset="-122"/>
                 <a:cs typeface="맑은 고딕" pitchFamily="34" charset="-120"/>
               </a:rPr>
-              <a:t>끈 2 m를 3 : 2로 자르면</a:t>
+              <a:t>끈 2 m를 3 : 2로 자르면</a:t>
             </a:r>
             <a:endParaRPr lang="ko-KR" sz="2800" dirty="0"/>
           </a:p>
@@ -11159,7 +11159,7 @@
                 <a:ea typeface="맑은 고딕" pitchFamily="34" charset="-122"/>
                 <a:cs typeface="맑은 고딕" pitchFamily="34" charset="-120"/>
               </a:rPr>
-              <a:t>둘레가 56 cm, 가로 : 세로 = 4 : 3인</a:t>
+              <a:t>둘레가 56 cm, 가로 : 세로 = 4 : 3인</a:t>
             </a:r>
             <a:endParaRPr lang="ko-KR" sz="2800" dirty="0"/>
           </a:p>
